--- a/docs/04_presentation/presentation_0529.pptx
+++ b/docs/04_presentation/presentation_0529.pptx
@@ -560,7 +560,40 @@
           <a:bodyPr/>
           <a:lstStyle/>
           <a:p>
-            <a:endParaRPr kumimoji="1" lang="ja-JP" altLang="en-US" dirty="0"/>
+            <a:r>
+              <a:rPr kumimoji="1" lang="ja-JP" altLang="en-US" dirty="0"/>
+              <a:t>＿人人人人人人人人人人人人人人人人人＿</a:t>
+            </a:r>
+            <a:endParaRPr kumimoji="1" lang="en-US" altLang="ja-JP" dirty="0"/>
+          </a:p>
+          <a:p>
+            <a:r>
+              <a:rPr kumimoji="1" lang="ja-JP" altLang="en-US" dirty="0"/>
+              <a:t>＞</a:t>
+            </a:r>
+            <a:r>
+              <a:rPr kumimoji="1" lang="en-US" altLang="ja-JP" dirty="0"/>
+              <a:t>Web</a:t>
+            </a:r>
+            <a:r>
+              <a:rPr kumimoji="1" lang="ja-JP" altLang="en-US" dirty="0"/>
+              <a:t>アプリケーション開発演習成果報告　＜</a:t>
+            </a:r>
+            <a:endParaRPr kumimoji="1" lang="en-US" altLang="ja-JP" dirty="0"/>
+          </a:p>
+          <a:p>
+            <a:r>
+              <a:rPr kumimoji="1" lang="ja-JP" altLang="en-US" dirty="0"/>
+              <a:t>￣</a:t>
+            </a:r>
+            <a:r>
+              <a:rPr kumimoji="1" lang="en-US" altLang="ja-JP" dirty="0"/>
+              <a:t>Y^Y^Y^Y^Y^Y^Y^Y^Y^Y^Y^Y</a:t>
+            </a:r>
+            <a:r>
+              <a:rPr kumimoji="1" lang="ja-JP" altLang="en-US" dirty="0"/>
+              <a:t>￣</a:t>
+            </a:r>
           </a:p>
         </p:txBody>
       </p:sp>
@@ -581,7 +614,7 @@
           <a:p>
             <a:fld id="{E89591DA-DCDE-4705-9DC5-EA1EEFFFE5BE}" type="slidenum">
               <a:rPr kumimoji="1" lang="ja-JP" altLang="en-US" smtClean="0"/>
-              <a:t>8</a:t>
+              <a:t>1</a:t>
             </a:fld>
             <a:endParaRPr kumimoji="1" lang="ja-JP" altLang="en-US"/>
           </a:p>
@@ -590,7 +623,7 @@
     </p:spTree>
     <p:extLst>
       <p:ext uri="{BB962C8B-B14F-4D97-AF65-F5344CB8AC3E}">
-        <p14:creationId xmlns:p14="http://schemas.microsoft.com/office/powerpoint/2010/main" val="213962465"/>
+        <p14:creationId xmlns:p14="http://schemas.microsoft.com/office/powerpoint/2010/main" val="278116937"/>
       </p:ext>
     </p:extLst>
   </p:cSld>
@@ -644,6 +677,90 @@
           <a:bodyPr/>
           <a:lstStyle/>
           <a:p>
+            <a:endParaRPr kumimoji="1" lang="ja-JP" altLang="en-US" dirty="0"/>
+          </a:p>
+        </p:txBody>
+      </p:sp>
+      <p:sp>
+        <p:nvSpPr>
+          <p:cNvPr id="4" name="スライド番号プレースホルダー 3"/>
+          <p:cNvSpPr>
+            <a:spLocks noGrp="1"/>
+          </p:cNvSpPr>
+          <p:nvPr>
+            <p:ph type="sldNum" sz="quarter" idx="5"/>
+          </p:nvPr>
+        </p:nvSpPr>
+        <p:spPr/>
+        <p:txBody>
+          <a:bodyPr/>
+          <a:lstStyle/>
+          <a:p>
+            <a:fld id="{E89591DA-DCDE-4705-9DC5-EA1EEFFFE5BE}" type="slidenum">
+              <a:rPr kumimoji="1" lang="ja-JP" altLang="en-US" smtClean="0"/>
+              <a:t>8</a:t>
+            </a:fld>
+            <a:endParaRPr kumimoji="1" lang="ja-JP" altLang="en-US"/>
+          </a:p>
+        </p:txBody>
+      </p:sp>
+    </p:spTree>
+    <p:extLst>
+      <p:ext uri="{BB962C8B-B14F-4D97-AF65-F5344CB8AC3E}">
+        <p14:creationId xmlns:p14="http://schemas.microsoft.com/office/powerpoint/2010/main" val="213962465"/>
+      </p:ext>
+    </p:extLst>
+  </p:cSld>
+  <p:clrMapOvr>
+    <a:masterClrMapping/>
+  </p:clrMapOvr>
+</p:notes>
+</file>
+
+<file path=ppt/notesSlides/notesSlide3.xml><?xml version="1.0" encoding="utf-8"?>
+<p:notes xmlns:a="http://schemas.openxmlformats.org/drawingml/2006/main" xmlns:r="http://schemas.openxmlformats.org/officeDocument/2006/relationships" xmlns:p="http://schemas.openxmlformats.org/presentationml/2006/main">
+  <p:cSld>
+    <p:spTree>
+      <p:nvGrpSpPr>
+        <p:cNvPr id="1" name=""/>
+        <p:cNvGrpSpPr/>
+        <p:nvPr/>
+      </p:nvGrpSpPr>
+      <p:grpSpPr>
+        <a:xfrm>
+          <a:off x="0" y="0"/>
+          <a:ext cx="0" cy="0"/>
+          <a:chOff x="0" y="0"/>
+          <a:chExt cx="0" cy="0"/>
+        </a:xfrm>
+      </p:grpSpPr>
+      <p:sp>
+        <p:nvSpPr>
+          <p:cNvPr id="2" name="スライド イメージ プレースホルダー 1"/>
+          <p:cNvSpPr>
+            <a:spLocks noGrp="1" noRot="1" noChangeAspect="1"/>
+          </p:cNvSpPr>
+          <p:nvPr>
+            <p:ph type="sldImg"/>
+          </p:nvPr>
+        </p:nvSpPr>
+        <p:spPr/>
+      </p:sp>
+      <p:sp>
+        <p:nvSpPr>
+          <p:cNvPr id="3" name="ノート プレースホルダー 2"/>
+          <p:cNvSpPr>
+            <a:spLocks noGrp="1"/>
+          </p:cNvSpPr>
+          <p:nvPr>
+            <p:ph type="body" idx="1"/>
+          </p:nvPr>
+        </p:nvSpPr>
+        <p:spPr/>
+        <p:txBody>
+          <a:bodyPr/>
+          <a:lstStyle/>
+          <a:p>
             <a:r>
               <a:rPr kumimoji="1" lang="ja-JP" altLang="en-US" dirty="0"/>
               <a:t>作業順の選び方がよくなかった</a:t>
@@ -687,7 +804,7 @@
 </p:notes>
 </file>
 
-<file path=ppt/notesSlides/notesSlide3.xml><?xml version="1.0" encoding="utf-8"?>
+<file path=ppt/notesSlides/notesSlide4.xml><?xml version="1.0" encoding="utf-8"?>
 <p:notes xmlns:a="http://schemas.openxmlformats.org/drawingml/2006/main" xmlns:r="http://schemas.openxmlformats.org/officeDocument/2006/relationships" xmlns:p="http://schemas.openxmlformats.org/presentationml/2006/main">
   <p:cSld>
     <p:spTree>
@@ -8314,35 +8431,6 @@
               <a:rPr lang="ja-JP" altLang="en-US" sz="4400" dirty="0"/>
               <a:t>ご清聴ありがとうございました</a:t>
             </a:r>
-          </a:p>
-        </p:txBody>
-      </p:sp>
-      <p:sp>
-        <p:nvSpPr>
-          <p:cNvPr id="4" name="スライド番号プレースホルダー 3">
-            <a:extLst>
-              <a:ext uri="{FF2B5EF4-FFF2-40B4-BE49-F238E27FC236}">
-                <a16:creationId xmlns:a16="http://schemas.microsoft.com/office/drawing/2014/main" id="{E806FEE8-D2B6-1F32-F992-2124B8B23934}"/>
-              </a:ext>
-            </a:extLst>
-          </p:cNvPr>
-          <p:cNvSpPr>
-            <a:spLocks noGrp="1"/>
-          </p:cNvSpPr>
-          <p:nvPr>
-            <p:ph type="sldNum" sz="quarter" idx="12"/>
-          </p:nvPr>
-        </p:nvSpPr>
-        <p:spPr/>
-        <p:txBody>
-          <a:bodyPr/>
-          <a:lstStyle/>
-          <a:p>
-            <a:fld id="{AF3F0378-51CF-4CB4-B26B-D0506873D852}" type="slidenum">
-              <a:rPr kumimoji="1" lang="ja-JP" altLang="en-US" smtClean="0"/>
-              <a:t>21</a:t>
-            </a:fld>
-            <a:endParaRPr kumimoji="1" lang="ja-JP" altLang="en-US" dirty="0"/>
           </a:p>
         </p:txBody>
       </p:sp>
